--- a/RL/01 - Introduction in Reinforcement Learning/01 - 01 Introduction in RL/Presentation/01_Introduction_in_RL.pptx
+++ b/RL/01 - Introduction in Reinforcement Learning/01 - 01 Introduction in RL/Presentation/01_Introduction_in_RL.pptx
@@ -63,7 +63,7 @@
   <p:notesSz cx="6858000" cy="9144000"/>
   <p:embeddedFontLst>
     <p:embeddedFont>
-      <p:font typeface="AkayaTelivigala" pitchFamily="2" charset="77"/>
+      <p:font typeface="AkayaTelivigala" panose="020F0502020204030204" pitchFamily="34" charset="0"/>
       <p:regular r:id="rId53"/>
     </p:embeddedFont>
     <p:embeddedFont>
@@ -27029,7 +27029,7 @@
                 <a:cs typeface="Roboto"/>
                 <a:sym typeface="Roboto"/>
               </a:rPr>
-              <a:t>Понедельник</a:t>
+              <a:t>Вторник</a:t>
             </a:r>
             <a:r>
               <a:rPr lang="ru" sz="1300" b="1" dirty="0">
@@ -27053,7 +27053,7 @@
                 <a:cs typeface="Roboto"/>
                 <a:sym typeface="Roboto"/>
               </a:rPr>
-              <a:t>среда</a:t>
+              <a:t>пятница</a:t>
             </a:r>
             <a:r>
               <a:rPr lang="ru" sz="1300" b="1" dirty="0">
@@ -27651,18 +27651,6 @@
               <a:t>-</a:t>
             </a:r>
             <a:r>
-              <a:rPr lang="en-US" sz="1300" b="1" dirty="0">
-                <a:solidFill>
-                  <a:schemeClr val="dk1"/>
-                </a:solidFill>
-                <a:latin typeface="Roboto"/>
-                <a:ea typeface="Roboto"/>
-                <a:cs typeface="Roboto"/>
-                <a:sym typeface="Roboto"/>
-              </a:rPr>
-              <a:t>0</a:t>
-            </a:r>
-            <a:r>
               <a:rPr lang="ru-RU" sz="1300" b="1" dirty="0">
                 <a:solidFill>
                   <a:schemeClr val="dk1"/>
@@ -27672,7 +27660,7 @@
                 <a:cs typeface="Roboto"/>
                 <a:sym typeface="Roboto"/>
               </a:rPr>
-              <a:t>9</a:t>
+              <a:t>12</a:t>
             </a:r>
             <a:endParaRPr sz="1300" b="1" dirty="0">
               <a:latin typeface="Roboto"/>
@@ -34386,13 +34374,13 @@
               <a:t>-</a:t>
             </a:r>
             <a:r>
-              <a:rPr lang="en-US" sz="1500" b="1" dirty="0">
+              <a:rPr lang="ru-RU" sz="1500" b="1" dirty="0">
                 <a:latin typeface="Roboto"/>
                 <a:ea typeface="Roboto"/>
                 <a:cs typeface="Roboto"/>
                 <a:sym typeface="Roboto"/>
               </a:rPr>
-              <a:t>09</a:t>
+              <a:t>12</a:t>
             </a:r>
             <a:endParaRPr sz="1500" dirty="0">
               <a:latin typeface="Roboto"/>
@@ -38569,7 +38557,7 @@
                 <a:cs typeface="Roboto"/>
                 <a:sym typeface="Roboto"/>
               </a:rPr>
-              <a:t>7</a:t>
+              <a:t>14</a:t>
             </a:r>
             <a:r>
               <a:rPr lang="ru" sz="1500" dirty="0">
@@ -38593,7 +38581,7 @@
                 <a:cs typeface="Roboto"/>
                 <a:sym typeface="Roboto"/>
               </a:rPr>
-              <a:t>октября</a:t>
+              <a:t>января</a:t>
             </a:r>
             <a:r>
               <a:rPr lang="ru" sz="1500" dirty="0">
@@ -38605,7 +38593,7 @@
                 <a:cs typeface="Roboto"/>
                 <a:sym typeface="Roboto"/>
               </a:rPr>
-              <a:t> 2024</a:t>
+              <a:t> 2025</a:t>
             </a:r>
             <a:endParaRPr sz="1500" dirty="0">
               <a:solidFill>

--- a/RL/01 - Introduction in Reinforcement Learning/01 - 01 Introduction in RL/Presentation/01_Introduction_in_RL.pptx
+++ b/RL/01 - Introduction in Reinforcement Learning/01 - 01 Introduction in RL/Presentation/01_Introduction_in_RL.pptx
@@ -63,7 +63,7 @@
   <p:notesSz cx="6858000" cy="9144000"/>
   <p:embeddedFontLst>
     <p:embeddedFont>
-      <p:font typeface="AkayaTelivigala" panose="020F0502020204030204" pitchFamily="34" charset="0"/>
+      <p:font typeface="AkayaTelivigala" pitchFamily="2" charset="77"/>
       <p:regular r:id="rId53"/>
     </p:embeddedFont>
     <p:embeddedFont>
@@ -26757,10 +26757,10 @@
               <a:buNone/>
             </a:pPr>
             <a:r>
-              <a:rPr lang="ru" sz="4000"/>
+              <a:rPr lang="ru" sz="4000" dirty="0"/>
               <a:t>Меня хорошо видно</a:t>
             </a:r>
-            <a:endParaRPr sz="4000"/>
+            <a:endParaRPr sz="4000" dirty="0"/>
           </a:p>
           <a:p>
             <a:pPr marL="0" lvl="0" indent="0" algn="l" rtl="0">
@@ -26773,10 +26773,17 @@
               <a:buNone/>
             </a:pPr>
             <a:r>
-              <a:rPr lang="ru" sz="4000"/>
+              <a:rPr lang="ru" sz="4000" dirty="0"/>
               <a:t>&amp;&amp; слышно?</a:t>
             </a:r>
-            <a:endParaRPr sz="4000"/>
+            <a:br>
+              <a:rPr lang="en-US" sz="4000" dirty="0"/>
+            </a:br>
+            <a:r>
+              <a:rPr lang="ru-RU" sz="2400" b="0" dirty="0"/>
+              <a:t>Ставьте «+» если все хорошо</a:t>
+            </a:r>
+            <a:endParaRPr sz="4000" b="0" dirty="0"/>
           </a:p>
         </p:txBody>
       </p:sp>
@@ -27029,7 +27036,7 @@
                 <a:cs typeface="Roboto"/>
                 <a:sym typeface="Roboto"/>
               </a:rPr>
-              <a:t>Вторник</a:t>
+              <a:t>Понедельник</a:t>
             </a:r>
             <a:r>
               <a:rPr lang="ru" sz="1300" b="1" dirty="0">
@@ -27053,7 +27060,7 @@
                 <a:cs typeface="Roboto"/>
                 <a:sym typeface="Roboto"/>
               </a:rPr>
-              <a:t>пятница</a:t>
+              <a:t>среда</a:t>
             </a:r>
             <a:r>
               <a:rPr lang="ru" sz="1300" b="1" dirty="0">
@@ -27238,7 +27245,7 @@
         <p:spPr>
           <a:xfrm>
             <a:off x="3456338" y="2528549"/>
-            <a:ext cx="2138100" cy="1985700"/>
+            <a:ext cx="2138100" cy="2185183"/>
           </a:xfrm>
           <a:prstGeom prst="rect">
             <a:avLst/>
@@ -27319,8 +27326,19 @@
                 <a:cs typeface="Roboto"/>
                 <a:sym typeface="Roboto"/>
               </a:rPr>
-              <a:t>1 дз в неделю.</a:t>
-            </a:r>
+              <a:t>1 дз на модуль</a:t>
+            </a:r>
+          </a:p>
+          <a:p>
+            <a:pPr marL="0" lvl="0" indent="0" algn="l" rtl="0">
+              <a:spcBef>
+                <a:spcPts val="0"/>
+              </a:spcBef>
+              <a:spcAft>
+                <a:spcPts val="0"/>
+              </a:spcAft>
+              <a:buNone/>
+            </a:pPr>
             <a:endParaRPr sz="1300" b="1" dirty="0">
               <a:latin typeface="Roboto"/>
               <a:ea typeface="Roboto"/>
@@ -27627,7 +27645,7 @@
               <a:t>OTUS RL-202</a:t>
             </a:r>
             <a:r>
-              <a:rPr lang="en-US" sz="1300" b="1" dirty="0">
+              <a:rPr lang="ru-RU" sz="1300" b="1" dirty="0">
                 <a:solidFill>
                   <a:schemeClr val="dk1"/>
                 </a:solidFill>
@@ -27636,7 +27654,7 @@
                 <a:cs typeface="Roboto"/>
                 <a:sym typeface="Roboto"/>
               </a:rPr>
-              <a:t>4</a:t>
+              <a:t>5</a:t>
             </a:r>
             <a:r>
               <a:rPr lang="ru" sz="1300" b="1" dirty="0">
@@ -27660,7 +27678,7 @@
                 <a:cs typeface="Roboto"/>
                 <a:sym typeface="Roboto"/>
               </a:rPr>
-              <a:t>12</a:t>
+              <a:t>03</a:t>
             </a:r>
             <a:endParaRPr sz="1300" b="1" dirty="0">
               <a:latin typeface="Roboto"/>
@@ -31541,71 +31559,37 @@
       </p:pic>
       <p:sp>
         <p:nvSpPr>
-          <p:cNvPr id="10" name="Google Shape;209;p48">
+          <p:cNvPr id="11" name="Google Shape;209;p48">
             <a:extLst>
               <a:ext uri="{FF2B5EF4-FFF2-40B4-BE49-F238E27FC236}">
-                <a16:creationId xmlns:a16="http://schemas.microsoft.com/office/drawing/2014/main" id="{33B90E1D-3F43-DA49-B28B-ECCA7B6E41F8}"/>
+                <a16:creationId xmlns:a16="http://schemas.microsoft.com/office/drawing/2014/main" id="{A706D130-4F36-414C-8236-16D8615584AB}"/>
               </a:ext>
             </a:extLst>
           </p:cNvPr>
           <p:cNvSpPr txBox="1">
-            <a:spLocks noGrp="1"/>
+            <a:spLocks/>
           </p:cNvSpPr>
-          <p:nvPr>
-            <p:ph type="subTitle" idx="3"/>
-          </p:nvPr>
+          <p:nvPr/>
         </p:nvSpPr>
         <p:spPr>
           <a:xfrm>
             <a:off x="3082400" y="2701811"/>
-            <a:ext cx="5095500" cy="2133660"/>
+            <a:ext cx="5938750" cy="2133660"/>
           </a:xfrm>
           <a:prstGeom prst="rect">
             <a:avLst/>
           </a:prstGeom>
+          <a:noFill/>
+          <a:ln>
+            <a:noFill/>
+          </a:ln>
         </p:spPr>
         <p:txBody>
           <a:bodyPr spcFirstLastPara="1" wrap="square" lIns="91425" tIns="91425" rIns="91425" bIns="91425" anchor="t" anchorCtr="0">
             <a:normAutofit fontScale="85000" lnSpcReduction="20000"/>
           </a:bodyPr>
-          <a:lstStyle/>
-          <a:p>
-            <a:pPr marL="1377950" indent="-1373188"/>
-            <a:r>
-              <a:rPr lang="ru-RU" sz="1150" b="1" dirty="0"/>
-              <a:t>Руководитель курсов: </a:t>
-            </a:r>
-            <a:r>
-              <a:rPr lang="en-US" sz="1150" b="1" dirty="0"/>
-              <a:t>Reinforcement Learning</a:t>
-            </a:r>
-            <a:r>
-              <a:rPr lang="ru-RU" sz="1150" b="1" dirty="0"/>
-              <a:t>, </a:t>
-            </a:r>
-            <a:r>
-              <a:rPr lang="en-US" sz="1150" b="1" dirty="0"/>
-              <a:t>ML Professional, ML Basic,</a:t>
-            </a:r>
-            <a:br>
-              <a:rPr lang="en-US" sz="1150" b="1" dirty="0"/>
-            </a:br>
-            <a:r>
-              <a:rPr lang="en-US" sz="1150" b="1" dirty="0" err="1"/>
-              <a:t>MLOps</a:t>
-            </a:r>
-            <a:r>
-              <a:rPr lang="en-US" sz="1150" b="1" dirty="0"/>
-              <a:t>, </a:t>
-            </a:r>
-            <a:r>
-              <a:rPr lang="en-US" sz="1150" b="1" dirty="0" err="1"/>
-              <a:t>FinML</a:t>
-            </a:r>
-            <a:endParaRPr lang="ru-RU" sz="1150" b="1" dirty="0"/>
-          </a:p>
-          <a:p>
-            <a:pPr marL="0" marR="0" lvl="0" indent="0" algn="l" rtl="0">
+          <a:lstStyle>
+            <a:lvl1pPr marL="0" lvl="0" algn="l">
               <a:lnSpc>
                 <a:spcPct val="100000"/>
               </a:lnSpc>
@@ -31615,12 +31599,21 @@
               <a:spcAft>
                 <a:spcPts val="0"/>
               </a:spcAft>
-              <a:buNone/>
-            </a:pPr>
-            <a:endParaRPr lang="en-US" sz="1150" b="1" dirty="0"/>
-          </a:p>
-          <a:p>
-            <a:pPr marL="0" marR="0" lvl="0" indent="0" algn="l" rtl="0">
+              <a:buClr>
+                <a:schemeClr val="dk1"/>
+              </a:buClr>
+              <a:buSzPts val="1300"/>
+              <a:buNone/>
+              <a:defRPr sz="1300" b="0" i="0">
+                <a:solidFill>
+                  <a:schemeClr val="dk1"/>
+                </a:solidFill>
+                <a:latin typeface="+mn-lt"/>
+                <a:ea typeface="+mn-ea"/>
+                <a:cs typeface="+mn-cs"/>
+              </a:defRPr>
+            </a:lvl1pPr>
+            <a:lvl2pPr marL="457200" lvl="1" algn="l">
               <a:lnSpc>
                 <a:spcPct val="100000"/>
               </a:lnSpc>
@@ -31630,24 +31623,21 @@
               <a:spcAft>
                 <a:spcPts val="0"/>
               </a:spcAft>
-              <a:buNone/>
-            </a:pPr>
-            <a:r>
-              <a:rPr lang="en-US" sz="1150" b="1" dirty="0" err="1"/>
-              <a:t>Teamlead</a:t>
-            </a:r>
-            <a:r>
-              <a:rPr lang="ru-RU" sz="1150" b="1" dirty="0"/>
-              <a:t>, главный инженер проекта</a:t>
-            </a:r>
-            <a:r>
-              <a:rPr lang="en-US" sz="1150" b="1" dirty="0"/>
-              <a:t>, </a:t>
-            </a:r>
-            <a:endParaRPr lang="ru-RU" sz="1150" b="1" dirty="0"/>
-          </a:p>
-          <a:p>
-            <a:pPr marL="0" marR="0" lvl="0" indent="0" algn="l" rtl="0">
+              <a:buClr>
+                <a:schemeClr val="dk1"/>
+              </a:buClr>
+              <a:buSzPts val="1500"/>
+              <a:buNone/>
+              <a:defRPr>
+                <a:solidFill>
+                  <a:schemeClr val="dk1"/>
+                </a:solidFill>
+                <a:latin typeface="+mn-lt"/>
+                <a:ea typeface="+mn-ea"/>
+                <a:cs typeface="+mn-cs"/>
+              </a:defRPr>
+            </a:lvl2pPr>
+            <a:lvl3pPr marL="914400" lvl="2" algn="l">
               <a:lnSpc>
                 <a:spcPct val="100000"/>
               </a:lnSpc>
@@ -31657,23 +31647,21 @@
               <a:spcAft>
                 <a:spcPts val="0"/>
               </a:spcAft>
-              <a:buNone/>
-            </a:pPr>
-            <a:r>
-              <a:rPr lang="ru-RU" sz="1150" b="1" dirty="0"/>
-              <a:t>Физический факультет МГУ, </a:t>
-            </a:r>
-            <a:r>
-              <a:rPr lang="en-US" sz="1150" b="1" dirty="0"/>
-              <a:t>PhD </a:t>
-            </a:r>
-            <a:r>
-              <a:rPr lang="ru-RU" sz="1150" b="1" dirty="0"/>
-              <a:t>теоретическая физика</a:t>
-            </a:r>
-          </a:p>
-          <a:p>
-            <a:pPr marL="0" marR="0" lvl="0" indent="0" algn="l" rtl="0">
+              <a:buClr>
+                <a:schemeClr val="dk1"/>
+              </a:buClr>
+              <a:buSzPts val="1300"/>
+              <a:buNone/>
+              <a:defRPr>
+                <a:solidFill>
+                  <a:schemeClr val="dk1"/>
+                </a:solidFill>
+                <a:latin typeface="+mn-lt"/>
+                <a:ea typeface="+mn-ea"/>
+                <a:cs typeface="+mn-cs"/>
+              </a:defRPr>
+            </a:lvl3pPr>
+            <a:lvl4pPr marL="1371600" lvl="3" algn="l">
               <a:lnSpc>
                 <a:spcPct val="100000"/>
               </a:lnSpc>
@@ -31683,12 +31671,21 @@
               <a:spcAft>
                 <a:spcPts val="0"/>
               </a:spcAft>
-              <a:buNone/>
-            </a:pPr>
-            <a:endParaRPr sz="1150" dirty="0"/>
-          </a:p>
-          <a:p>
-            <a:pPr marL="0" marR="0" lvl="0" indent="0" algn="l" rtl="0">
+              <a:buClr>
+                <a:schemeClr val="dk1"/>
+              </a:buClr>
+              <a:buSzPts val="1300"/>
+              <a:buNone/>
+              <a:defRPr>
+                <a:solidFill>
+                  <a:schemeClr val="dk1"/>
+                </a:solidFill>
+                <a:latin typeface="+mn-lt"/>
+                <a:ea typeface="+mn-ea"/>
+                <a:cs typeface="+mn-cs"/>
+              </a:defRPr>
+            </a:lvl4pPr>
+            <a:lvl5pPr marL="1828800" lvl="4" algn="l">
               <a:lnSpc>
                 <a:spcPct val="100000"/>
               </a:lnSpc>
@@ -31698,16 +31695,21 @@
               <a:spcAft>
                 <a:spcPts val="0"/>
               </a:spcAft>
-              <a:buNone/>
-            </a:pPr>
-            <a:r>
-              <a:rPr lang="ru" sz="1150" b="1" dirty="0"/>
-              <a:t>Опыт:</a:t>
-            </a:r>
-            <a:endParaRPr sz="1150" dirty="0"/>
-          </a:p>
-          <a:p>
-            <a:pPr marL="0" marR="0" lvl="0" indent="0" algn="l" rtl="0">
+              <a:buClr>
+                <a:schemeClr val="dk1"/>
+              </a:buClr>
+              <a:buSzPts val="1300"/>
+              <a:buNone/>
+              <a:defRPr>
+                <a:solidFill>
+                  <a:schemeClr val="dk1"/>
+                </a:solidFill>
+                <a:latin typeface="+mn-lt"/>
+                <a:ea typeface="+mn-ea"/>
+                <a:cs typeface="+mn-cs"/>
+              </a:defRPr>
+            </a:lvl5pPr>
+            <a:lvl6pPr marL="2286000" lvl="5" algn="l">
               <a:lnSpc>
                 <a:spcPct val="100000"/>
               </a:lnSpc>
@@ -31717,19 +31719,21 @@
               <a:spcAft>
                 <a:spcPts val="0"/>
               </a:spcAft>
-              <a:buNone/>
-            </a:pPr>
-            <a:r>
-              <a:rPr lang="ru-RU" sz="1150" dirty="0"/>
-              <a:t>Б</a:t>
-            </a:r>
-            <a:r>
-              <a:rPr lang="ru" sz="1150" dirty="0"/>
-              <a:t>олее 15 лет занимался прикладной математикой и мат моделированием</a:t>
-            </a:r>
-          </a:p>
-          <a:p>
-            <a:pPr marL="0" marR="0" lvl="0" indent="0" algn="l" rtl="0">
+              <a:buClr>
+                <a:schemeClr val="dk1"/>
+              </a:buClr>
+              <a:buSzPts val="1300"/>
+              <a:buNone/>
+              <a:defRPr>
+                <a:solidFill>
+                  <a:schemeClr val="dk1"/>
+                </a:solidFill>
+                <a:latin typeface="+mn-lt"/>
+                <a:ea typeface="+mn-ea"/>
+                <a:cs typeface="+mn-cs"/>
+              </a:defRPr>
+            </a:lvl6pPr>
+            <a:lvl7pPr marL="2743200" lvl="6" algn="l">
               <a:lnSpc>
                 <a:spcPct val="100000"/>
               </a:lnSpc>
@@ -31739,16 +31743,21 @@
               <a:spcAft>
                 <a:spcPts val="0"/>
               </a:spcAft>
-              <a:buNone/>
-            </a:pPr>
-            <a:r>
-              <a:rPr lang="ru" sz="1150" dirty="0"/>
-              <a:t>(Data Scientist) (Python, С++) в НИИ ПАО Газпром</a:t>
-            </a:r>
-            <a:endParaRPr sz="1150" dirty="0"/>
-          </a:p>
-          <a:p>
-            <a:pPr marL="0" marR="0" lvl="0" indent="0" algn="l" rtl="0">
+              <a:buClr>
+                <a:schemeClr val="dk1"/>
+              </a:buClr>
+              <a:buSzPts val="1300"/>
+              <a:buNone/>
+              <a:defRPr>
+                <a:solidFill>
+                  <a:schemeClr val="dk1"/>
+                </a:solidFill>
+                <a:latin typeface="+mn-lt"/>
+                <a:ea typeface="+mn-ea"/>
+                <a:cs typeface="+mn-cs"/>
+              </a:defRPr>
+            </a:lvl7pPr>
+            <a:lvl8pPr marL="3200400" lvl="7" algn="l">
               <a:lnSpc>
                 <a:spcPct val="100000"/>
               </a:lnSpc>
@@ -31758,12 +31767,21 @@
               <a:spcAft>
                 <a:spcPts val="0"/>
               </a:spcAft>
-              <a:buNone/>
-            </a:pPr>
-            <a:endParaRPr sz="1150" dirty="0"/>
-          </a:p>
-          <a:p>
-            <a:pPr marL="0" marR="0" lvl="0" indent="0" algn="l" rtl="0">
+              <a:buClr>
+                <a:schemeClr val="dk1"/>
+              </a:buClr>
+              <a:buSzPts val="1300"/>
+              <a:buNone/>
+              <a:defRPr>
+                <a:solidFill>
+                  <a:schemeClr val="dk1"/>
+                </a:solidFill>
+                <a:latin typeface="+mn-lt"/>
+                <a:ea typeface="+mn-ea"/>
+                <a:cs typeface="+mn-cs"/>
+              </a:defRPr>
+            </a:lvl8pPr>
+            <a:lvl9pPr marL="3657600" lvl="8" algn="l">
               <a:lnSpc>
                 <a:spcPct val="100000"/>
               </a:lnSpc>
@@ -31773,98 +31791,199 @@
               <a:spcAft>
                 <a:spcPts val="0"/>
               </a:spcAft>
-              <a:buNone/>
+              <a:buClr>
+                <a:schemeClr val="dk1"/>
+              </a:buClr>
+              <a:buSzPts val="1300"/>
+              <a:buNone/>
+              <a:defRPr>
+                <a:solidFill>
+                  <a:schemeClr val="dk1"/>
+                </a:solidFill>
+                <a:latin typeface="+mn-lt"/>
+                <a:ea typeface="+mn-ea"/>
+                <a:cs typeface="+mn-cs"/>
+              </a:defRPr>
+            </a:lvl9pPr>
+          </a:lstStyle>
+          <a:p>
+            <a:pPr marL="1470025" indent="-1465263">
+              <a:tabLst>
+                <a:tab pos="1465263" algn="l"/>
+              </a:tabLst>
             </a:pPr>
             <a:r>
+              <a:rPr lang="ru-RU" sz="1150" b="1" kern="0" dirty="0"/>
+              <a:t>Руководитель курсов: </a:t>
+            </a:r>
+            <a:r>
+              <a:rPr lang="en-US" sz="1150" b="1" kern="0" dirty="0"/>
+              <a:t>	Reinforcement Learning, ML Professional, ML Basic, </a:t>
+            </a:r>
+            <a:br>
+              <a:rPr lang="en-US" sz="1150" b="1" kern="0" dirty="0"/>
+            </a:br>
+            <a:r>
+              <a:rPr lang="en-US" sz="1150" b="1" kern="0" dirty="0" err="1"/>
+              <a:t>MLOps</a:t>
+            </a:r>
+            <a:r>
+              <a:rPr lang="en-US" sz="1150" b="1" kern="0" dirty="0"/>
+              <a:t>, </a:t>
+            </a:r>
+            <a:r>
+              <a:rPr lang="en-US" sz="1150" b="1" kern="0" dirty="0" err="1"/>
+              <a:t>FinML</a:t>
+            </a:r>
+            <a:endParaRPr lang="en-US" sz="1150" b="1" kern="0" dirty="0"/>
+          </a:p>
+          <a:p>
+            <a:pPr rtl="0"/>
+            <a:endParaRPr lang="en-US" sz="1150" b="1" kern="0" dirty="0"/>
+          </a:p>
+          <a:p>
+            <a:pPr rtl="0"/>
+            <a:r>
+              <a:rPr lang="en-US" sz="1150" b="1" kern="0" dirty="0" err="1"/>
+              <a:t>Teamlead</a:t>
+            </a:r>
+            <a:r>
+              <a:rPr lang="en-US" sz="1150" b="1" kern="0" dirty="0"/>
+              <a:t>, </a:t>
+            </a:r>
+            <a:r>
+              <a:rPr lang="ru-RU" sz="1150" b="1" kern="0" dirty="0"/>
+              <a:t>главный инженер проекта, </a:t>
+            </a:r>
+          </a:p>
+          <a:p>
+            <a:pPr rtl="0"/>
+            <a:r>
+              <a:rPr lang="ru-RU" sz="1150" b="1" kern="0" dirty="0"/>
+              <a:t>Физический факультет МГУ, </a:t>
+            </a:r>
+            <a:r>
+              <a:rPr lang="en-US" sz="1150" b="1" kern="0" dirty="0"/>
+              <a:t>PhD </a:t>
+            </a:r>
+            <a:r>
+              <a:rPr lang="ru-RU" sz="1150" b="1" kern="0" dirty="0"/>
+              <a:t>теоретическая физика</a:t>
+            </a:r>
+          </a:p>
+          <a:p>
+            <a:pPr rtl="0"/>
+            <a:endParaRPr lang="ru-RU" sz="1150" kern="0" dirty="0"/>
+          </a:p>
+          <a:p>
+            <a:pPr rtl="0"/>
+            <a:r>
+              <a:rPr lang="ru-RU" sz="1150" b="1" kern="0" dirty="0"/>
+              <a:t>Опыт:</a:t>
+            </a:r>
+            <a:endParaRPr lang="ru-RU" sz="1150" kern="0" dirty="0"/>
+          </a:p>
+          <a:p>
+            <a:pPr rtl="0"/>
+            <a:r>
+              <a:rPr lang="ru-RU" sz="1150" kern="0" dirty="0"/>
+              <a:t>Более </a:t>
+            </a:r>
+            <a:r>
               <a:rPr lang="ru-RU" sz="1150" dirty="0"/>
-              <a:t>Анализ временных рядов, эволюционные модели, финансовые модели</a:t>
-            </a:r>
-          </a:p>
-          <a:p>
-            <a:pPr marL="0" marR="0" lvl="0" indent="0" algn="l" rtl="0">
-              <a:lnSpc>
-                <a:spcPct val="100000"/>
-              </a:lnSpc>
-              <a:spcBef>
-                <a:spcPts val="0"/>
-              </a:spcBef>
-              <a:spcAft>
-                <a:spcPts val="0"/>
-              </a:spcAft>
-              <a:buNone/>
-            </a:pPr>
-            <a:endParaRPr lang="en-US" sz="1150" b="1" dirty="0"/>
-          </a:p>
-          <a:p>
-            <a:pPr marL="0" marR="0" lvl="0" indent="0" algn="l" rtl="0">
-              <a:lnSpc>
-                <a:spcPct val="100000"/>
-              </a:lnSpc>
-              <a:spcBef>
-                <a:spcPts val="0"/>
-              </a:spcBef>
-              <a:spcAft>
-                <a:spcPts val="0"/>
-              </a:spcAft>
-              <a:buNone/>
-            </a:pPr>
-            <a:r>
-              <a:rPr lang="en-US" sz="1150" b="1" dirty="0"/>
+              <a:t>20</a:t>
+            </a:r>
+            <a:r>
+              <a:rPr lang="ru-RU" sz="1150" kern="0" dirty="0"/>
+              <a:t> лет занимался прикладной математикой и мат моделированием</a:t>
+            </a:r>
+          </a:p>
+          <a:p>
+            <a:pPr rtl="0"/>
+            <a:r>
+              <a:rPr lang="ru-RU" sz="1150" kern="0" dirty="0"/>
+              <a:t>(</a:t>
+            </a:r>
+            <a:r>
+              <a:rPr lang="en-US" sz="1150" kern="0" dirty="0"/>
+              <a:t>Data Scientist) (Python, </a:t>
+            </a:r>
+            <a:r>
+              <a:rPr lang="ru-RU" sz="1150" kern="0" dirty="0"/>
+              <a:t>С++)</a:t>
+            </a:r>
+          </a:p>
+          <a:p>
+            <a:pPr rtl="0"/>
+            <a:endParaRPr lang="ru-RU" sz="1150" kern="0" dirty="0"/>
+          </a:p>
+          <a:p>
+            <a:pPr rtl="0"/>
+            <a:endParaRPr lang="ru-RU" sz="1150" b="1" kern="0" dirty="0"/>
+          </a:p>
+          <a:p>
+            <a:pPr rtl="0"/>
+            <a:r>
+              <a:rPr lang="ru-RU" sz="1150" b="1" kern="0" dirty="0"/>
               <a:t>@</a:t>
             </a:r>
             <a:r>
-              <a:rPr lang="en-US" sz="1150" b="1" dirty="0" err="1"/>
+              <a:rPr lang="en-US" sz="1150" b="1" kern="0" dirty="0" err="1"/>
               <a:t>stureiko</a:t>
             </a:r>
             <a:r>
-              <a:rPr lang="en-US" sz="1150" b="1" dirty="0"/>
+              <a:rPr lang="en-US" sz="1150" b="1" kern="0" dirty="0"/>
               <a:t> (TG)</a:t>
             </a:r>
-            <a:endParaRPr lang="ru-RU" sz="1150" b="1" dirty="0"/>
-          </a:p>
-          <a:p>
-            <a:pPr marL="0" marR="0" lvl="0" indent="0" algn="l" rtl="0">
-              <a:lnSpc>
-                <a:spcPct val="100000"/>
-              </a:lnSpc>
-              <a:spcBef>
-                <a:spcPts val="0"/>
-              </a:spcBef>
-              <a:spcAft>
-                <a:spcPts val="0"/>
-              </a:spcAft>
-              <a:buNone/>
-            </a:pPr>
-            <a:endParaRPr lang="ru-RU" sz="1150" b="1" dirty="0"/>
-          </a:p>
-          <a:p>
-            <a:pPr marL="0" marR="0" lvl="0" indent="0" algn="l" rtl="0">
-              <a:lnSpc>
-                <a:spcPct val="100000"/>
-              </a:lnSpc>
-              <a:spcBef>
-                <a:spcPts val="0"/>
-              </a:spcBef>
-              <a:spcAft>
-                <a:spcPts val="0"/>
-              </a:spcAft>
-              <a:buNone/>
-            </a:pPr>
-            <a:r>
-              <a:rPr lang="en-US" sz="1150" b="1" dirty="0"/>
+          </a:p>
+          <a:p>
+            <a:pPr rtl="0"/>
+            <a:endParaRPr lang="en-US" sz="1150" b="1" kern="0" dirty="0"/>
+          </a:p>
+          <a:p>
+            <a:pPr rtl="0"/>
+            <a:r>
+              <a:rPr lang="en-US" sz="1150" b="1" kern="0" dirty="0"/>
               <a:t>LinkedIn: </a:t>
             </a:r>
             <a:r>
-              <a:rPr lang="en-US" sz="1150" dirty="0">
+              <a:rPr lang="en-US" sz="1150" kern="0" dirty="0">
                 <a:hlinkClick r:id="rId4"/>
               </a:rPr>
               <a:t>igor-stureiko</a:t>
             </a:r>
             <a:r>
-              <a:rPr lang="en-US" sz="1150" dirty="0"/>
+              <a:rPr lang="en-US" sz="1150" kern="0" dirty="0"/>
               <a:t> </a:t>
             </a:r>
-            <a:endParaRPr sz="1400" dirty="0"/>
+          </a:p>
+          <a:p>
+            <a:pPr rtl="0"/>
+            <a:endParaRPr lang="en-US" sz="1150" kern="0" dirty="0"/>
+          </a:p>
+          <a:p>
+            <a:pPr rtl="0"/>
+            <a:r>
+              <a:rPr lang="en-US" sz="1150" b="1" kern="0" dirty="0"/>
+              <a:t>@</a:t>
+            </a:r>
+            <a:r>
+              <a:rPr lang="en-US" sz="1150" b="1" kern="0" dirty="0" err="1"/>
+              <a:t>rl_fintech</a:t>
+            </a:r>
+            <a:r>
+              <a:rPr lang="en-US" sz="1150" b="1" kern="0" dirty="0"/>
+              <a:t> </a:t>
+            </a:r>
+            <a:r>
+              <a:rPr lang="en-US" sz="1150" kern="0" dirty="0"/>
+              <a:t>(</a:t>
+            </a:r>
+            <a:r>
+              <a:rPr lang="ru-RU" sz="1150" kern="0" dirty="0"/>
+              <a:t>Мой канал о моделях в бизнесе)</a:t>
+            </a:r>
+            <a:endParaRPr lang="ru-RU" sz="1400" kern="0" dirty="0"/>
           </a:p>
         </p:txBody>
       </p:sp>
@@ -34356,13 +34475,13 @@
               <a:t>OTUS RL-202</a:t>
             </a:r>
             <a:r>
-              <a:rPr lang="en-US" sz="1500" b="1" dirty="0">
+              <a:rPr lang="ru-RU" sz="1500" b="1" dirty="0">
                 <a:latin typeface="Roboto"/>
                 <a:ea typeface="Roboto"/>
                 <a:cs typeface="Roboto"/>
                 <a:sym typeface="Roboto"/>
               </a:rPr>
-              <a:t>4</a:t>
+              <a:t>5</a:t>
             </a:r>
             <a:r>
               <a:rPr lang="ru" sz="1500" b="1" dirty="0">
@@ -34380,7 +34499,7 @@
                 <a:cs typeface="Roboto"/>
                 <a:sym typeface="Roboto"/>
               </a:rPr>
-              <a:t>12</a:t>
+              <a:t>03</a:t>
             </a:r>
             <a:endParaRPr sz="1500" dirty="0">
               <a:latin typeface="Roboto"/>
@@ -38557,7 +38676,7 @@
                 <a:cs typeface="Roboto"/>
                 <a:sym typeface="Roboto"/>
               </a:rPr>
-              <a:t>14</a:t>
+              <a:t>7</a:t>
             </a:r>
             <a:r>
               <a:rPr lang="ru" sz="1500" dirty="0">
@@ -38581,7 +38700,7 @@
                 <a:cs typeface="Roboto"/>
                 <a:sym typeface="Roboto"/>
               </a:rPr>
-              <a:t>января</a:t>
+              <a:t>апреля</a:t>
             </a:r>
             <a:r>
               <a:rPr lang="ru" sz="1500" dirty="0">

--- a/RL/01 - Introduction in Reinforcement Learning/01 - 01 Introduction in RL/Presentation/01_Introduction_in_RL.pptx
+++ b/RL/01 - Introduction in Reinforcement Learning/01 - 01 Introduction in RL/Presentation/01_Introduction_in_RL.pptx
@@ -34493,13 +34493,22 @@
               <a:t>-</a:t>
             </a:r>
             <a:r>
+              <a:rPr lang="en-US" sz="1500" b="1" dirty="0">
+                <a:latin typeface="Roboto"/>
+                <a:ea typeface="Roboto"/>
+                <a:cs typeface="Roboto"/>
+                <a:sym typeface="Roboto"/>
+              </a:rPr>
+              <a:t>1</a:t>
+            </a:r>
+            <a:r>
               <a:rPr lang="ru-RU" sz="1500" b="1" dirty="0">
                 <a:latin typeface="Roboto"/>
                 <a:ea typeface="Roboto"/>
                 <a:cs typeface="Roboto"/>
                 <a:sym typeface="Roboto"/>
               </a:rPr>
-              <a:t>03</a:t>
+              <a:t>0</a:t>
             </a:r>
             <a:endParaRPr sz="1500" dirty="0">
               <a:latin typeface="Roboto"/>
@@ -38676,7 +38685,7 @@
                 <a:cs typeface="Roboto"/>
                 <a:sym typeface="Roboto"/>
               </a:rPr>
-              <a:t>7</a:t>
+              <a:t>5</a:t>
             </a:r>
             <a:r>
               <a:rPr lang="ru" sz="1500" dirty="0">
@@ -38700,7 +38709,7 @@
                 <a:cs typeface="Roboto"/>
                 <a:sym typeface="Roboto"/>
               </a:rPr>
-              <a:t>апреля</a:t>
+              <a:t>ноября</a:t>
             </a:r>
             <a:r>
               <a:rPr lang="ru" sz="1500" dirty="0">

--- a/RL/01 - Introduction in Reinforcement Learning/01 - 01 Introduction in RL/Presentation/01_Introduction_in_RL.pptx
+++ b/RL/01 - Introduction in Reinforcement Learning/01 - 01 Introduction in RL/Presentation/01_Introduction_in_RL.pptx
@@ -26944,7 +26944,7 @@
         <p:spPr>
           <a:xfrm>
             <a:off x="473250" y="1823599"/>
-            <a:ext cx="2526300" cy="1985700"/>
+            <a:ext cx="2526300" cy="2185183"/>
           </a:xfrm>
           <a:prstGeom prst="rect">
             <a:avLst/>
@@ -27036,7 +27036,7 @@
                 <a:cs typeface="Roboto"/>
                 <a:sym typeface="Roboto"/>
               </a:rPr>
-              <a:t>Понедельник</a:t>
+              <a:t>Два раза в неделю</a:t>
             </a:r>
             <a:r>
               <a:rPr lang="ru" sz="1300" b="1" dirty="0">
@@ -27048,31 +27048,7 @@
                 <a:cs typeface="Roboto"/>
                 <a:sym typeface="Roboto"/>
               </a:rPr>
-              <a:t>, </a:t>
-            </a:r>
-            <a:r>
-              <a:rPr lang="ru-RU" sz="1300" b="1" dirty="0">
-                <a:solidFill>
-                  <a:schemeClr val="dk1"/>
-                </a:solidFill>
-                <a:latin typeface="Roboto"/>
-                <a:ea typeface="Roboto"/>
-                <a:cs typeface="Roboto"/>
-                <a:sym typeface="Roboto"/>
-              </a:rPr>
-              <a:t>среда</a:t>
-            </a:r>
-            <a:r>
-              <a:rPr lang="ru" sz="1300" b="1" dirty="0">
-                <a:solidFill>
-                  <a:schemeClr val="dk1"/>
-                </a:solidFill>
-                <a:latin typeface="Roboto"/>
-                <a:ea typeface="Roboto"/>
-                <a:cs typeface="Roboto"/>
-                <a:sym typeface="Roboto"/>
-              </a:rPr>
-              <a:t>, 20:00.</a:t>
+              <a:t> – вторник, четверг 20:00.</a:t>
             </a:r>
             <a:endParaRPr sz="1300" b="1" dirty="0">
               <a:latin typeface="Roboto"/>
@@ -27654,7 +27630,7 @@
                 <a:cs typeface="Roboto"/>
                 <a:sym typeface="Roboto"/>
               </a:rPr>
-              <a:t>5</a:t>
+              <a:t>6</a:t>
             </a:r>
             <a:r>
               <a:rPr lang="ru" sz="1300" b="1" dirty="0">
@@ -27678,7 +27654,7 @@
                 <a:cs typeface="Roboto"/>
                 <a:sym typeface="Roboto"/>
               </a:rPr>
-              <a:t>03</a:t>
+              <a:t>01</a:t>
             </a:r>
             <a:endParaRPr sz="1300" b="1" dirty="0">
               <a:latin typeface="Roboto"/>
@@ -34475,13 +34451,13 @@
               <a:t>OTUS RL-202</a:t>
             </a:r>
             <a:r>
-              <a:rPr lang="ru-RU" sz="1500" b="1" dirty="0">
+              <a:rPr lang="en-US" sz="1500" b="1" dirty="0">
                 <a:latin typeface="Roboto"/>
                 <a:ea typeface="Roboto"/>
                 <a:cs typeface="Roboto"/>
                 <a:sym typeface="Roboto"/>
               </a:rPr>
-              <a:t>5</a:t>
+              <a:t>6</a:t>
             </a:r>
             <a:r>
               <a:rPr lang="ru" sz="1500" b="1" dirty="0">
@@ -34499,16 +34475,7 @@
                 <a:cs typeface="Roboto"/>
                 <a:sym typeface="Roboto"/>
               </a:rPr>
-              <a:t>1</a:t>
-            </a:r>
-            <a:r>
-              <a:rPr lang="ru-RU" sz="1500" b="1" dirty="0">
-                <a:latin typeface="Roboto"/>
-                <a:ea typeface="Roboto"/>
-                <a:cs typeface="Roboto"/>
-                <a:sym typeface="Roboto"/>
-              </a:rPr>
-              <a:t>0</a:t>
+              <a:t>01</a:t>
             </a:r>
             <a:endParaRPr sz="1500" dirty="0">
               <a:latin typeface="Roboto"/>
@@ -38685,7 +38652,7 @@
                 <a:cs typeface="Roboto"/>
                 <a:sym typeface="Roboto"/>
               </a:rPr>
-              <a:t>5</a:t>
+              <a:t>17</a:t>
             </a:r>
             <a:r>
               <a:rPr lang="ru" sz="1500" dirty="0">
@@ -38709,10 +38676,10 @@
                 <a:cs typeface="Roboto"/>
                 <a:sym typeface="Roboto"/>
               </a:rPr>
-              <a:t>ноября</a:t>
-            </a:r>
-            <a:r>
-              <a:rPr lang="ru" sz="1500" dirty="0">
+              <a:t>февраля</a:t>
+            </a:r>
+            <a:r>
+              <a:rPr lang="ru" sz="1500">
                 <a:solidFill>
                   <a:srgbClr val="FF9900"/>
                 </a:solidFill>
@@ -38721,7 +38688,7 @@
                 <a:cs typeface="Roboto"/>
                 <a:sym typeface="Roboto"/>
               </a:rPr>
-              <a:t> 2025</a:t>
+              <a:t> 2026</a:t>
             </a:r>
             <a:endParaRPr sz="1500" dirty="0">
               <a:solidFill>
